--- a/content/W01/D1/slides/C2_W01_D01_half1_STUDENT.pptx
+++ b/content/W01/D1/slides/C2_W01_D01_half1_STUDENT.pptx
@@ -4484,14 +4484,14 @@
       </p:sp>
       <p:pic>
         <p:nvPicPr>
-          <p:cNvPr id="6" name="Picture 5" descr="da82c02731a963f6.png"/>
+          <p:cNvPr id="6" name="Picture 5" descr="3d2d5677e85fc94c.png"/>
           <p:cNvPicPr>
             <a:picLocks noChangeAspect="1"/>
           </p:cNvPicPr>
           <p:nvPr/>
         </p:nvPicPr>
         <p:blipFill>
-          <a:blip r:embed="rId2"/>
+          <a:blip r:embed="rId3"/>
           <a:stretch>
             <a:fillRect/>
           </a:stretch>
@@ -5934,14 +5934,14 @@
       </p:sp>
       <p:pic>
         <p:nvPicPr>
-          <p:cNvPr id="6" name="Picture 5" descr="34cc9107be8fcd9b.png"/>
+          <p:cNvPr id="6" name="Picture 5" descr="a8f9e73239dfaaf6.png"/>
           <p:cNvPicPr>
             <a:picLocks noChangeAspect="1"/>
           </p:cNvPicPr>
           <p:nvPr/>
         </p:nvPicPr>
         <p:blipFill>
-          <a:blip r:embed="rId2"/>
+          <a:blip r:embed="rId3"/>
           <a:stretch>
             <a:fillRect/>
           </a:stretch>
@@ -6513,14 +6513,14 @@
       </p:sp>
       <p:pic>
         <p:nvPicPr>
-          <p:cNvPr id="6" name="Picture 5" descr="2b80af7952725459.png"/>
+          <p:cNvPr id="6" name="Picture 5" descr="eef034f05d274f7d.png"/>
           <p:cNvPicPr>
             <a:picLocks noChangeAspect="1"/>
           </p:cNvPicPr>
           <p:nvPr/>
         </p:nvPicPr>
         <p:blipFill>
-          <a:blip r:embed="rId2"/>
+          <a:blip r:embed="rId3"/>
           <a:stretch>
             <a:fillRect/>
           </a:stretch>
@@ -10900,14 +10900,14 @@
       </p:sp>
       <p:pic>
         <p:nvPicPr>
-          <p:cNvPr id="6" name="Picture 5" descr="fc7a846100059601.png"/>
+          <p:cNvPr id="6" name="Picture 5" descr="9818d35797d8202d.png"/>
           <p:cNvPicPr>
             <a:picLocks noChangeAspect="1"/>
           </p:cNvPicPr>
           <p:nvPr/>
         </p:nvPicPr>
         <p:blipFill>
-          <a:blip r:embed="rId2"/>
+          <a:blip r:embed="rId3"/>
           <a:stretch>
             <a:fillRect/>
           </a:stretch>

--- a/content/W01/D1/slides/C2_W01_D01_half1_STUDENT.pptx
+++ b/content/W01/D1/slides/C2_W01_D01_half1_STUDENT.pptx
@@ -4484,7 +4484,7 @@
       </p:sp>
       <p:pic>
         <p:nvPicPr>
-          <p:cNvPr id="6" name="Picture 5" descr="3d2d5677e85fc94c.png"/>
+          <p:cNvPr id="6" name="Picture 5" descr="f2d6d0e73455edb9.png"/>
           <p:cNvPicPr>
             <a:picLocks noChangeAspect="1"/>
           </p:cNvPicPr>
@@ -4498,8 +4498,8 @@
         </p:blipFill>
         <p:spPr>
           <a:xfrm>
-            <a:off x="685800" y="2845268"/>
-            <a:ext cx="10820095" cy="1279223"/>
+            <a:off x="685800" y="2721109"/>
+            <a:ext cx="10820095" cy="1527542"/>
           </a:xfrm>
           <a:prstGeom prst="rect">
             <a:avLst/>
@@ -4514,7 +4514,7 @@
         </p:nvSpPr>
         <p:spPr>
           <a:xfrm>
-            <a:off x="685800" y="4270795"/>
+            <a:off x="685800" y="4394955"/>
             <a:ext cx="10820095" cy="564896"/>
           </a:xfrm>
           <a:prstGeom prst="rect">
@@ -10900,7 +10900,7 @@
       </p:sp>
       <p:pic>
         <p:nvPicPr>
-          <p:cNvPr id="6" name="Picture 5" descr="9818d35797d8202d.png"/>
+          <p:cNvPr id="6" name="Picture 5" descr="7e7e2c659a9aee1c.png"/>
           <p:cNvPicPr>
             <a:picLocks noChangeAspect="1"/>
           </p:cNvPicPr>
@@ -10914,8 +10914,8 @@
         </p:blipFill>
         <p:spPr>
           <a:xfrm>
-            <a:off x="685800" y="2691931"/>
-            <a:ext cx="10820095" cy="1585897"/>
+            <a:off x="685799" y="2761206"/>
+            <a:ext cx="10820095" cy="1447348"/>
           </a:xfrm>
           <a:prstGeom prst="rect">
             <a:avLst/>
@@ -10930,7 +10930,7 @@
         </p:nvSpPr>
         <p:spPr>
           <a:xfrm>
-            <a:off x="685800" y="4424132"/>
+            <a:off x="685800" y="4354858"/>
             <a:ext cx="10820095" cy="564896"/>
           </a:xfrm>
           <a:prstGeom prst="rect">

--- a/content/W01/D1/slides/C2_W01_D01_half1_STUDENT.pptx
+++ b/content/W01/D1/slides/C2_W01_D01_half1_STUDENT.pptx
@@ -1465,7 +1465,7 @@
           </a:p>
           <a:p>
             <a:r>
-              <a:t>up all day. Hand out the domain card at the close of part 6.</a:t>
+              <a:t>up all day. The domain card goes out at the end of the day, after the room has met the traps.</a:t>
             </a:r>
           </a:p>
         </p:txBody>
@@ -4720,27 +4720,32 @@
           </a:p>
           <a:p>
             <a:r>
-              <a:t>their illustrative numbers: retention of 300 over 380 is 79 percent and divides by survivors;</a:t>
-            </a:r>
-          </a:p>
-          <a:p>
-            <a:r>
-              <a:t>ten Rs 1,600 orders and one Rs 40,000 order have a mean of about Rs 5,091 and a median of</a:t>
-            </a:r>
-          </a:p>
-          <a:p>
-            <a:r>
-              <a:t>Rs 1,600; total growth of 15 percent is 2 percent like for like.</a:t>
-            </a:r>
-          </a:p>
-          <a:p>
-            <a:r>
-              <a:t>Ask: the app's AOV rose 10 percent this month; good news? Collect three reasons it might not be.</a:t>
-            </a:r>
-          </a:p>
-          <a:p>
-            <a:r>
-              <a:t>Land it: say the denominator and the window before the number.</a:t>
+              <a:t>their illustrative numbers: retention of 300 over 380 is 79 percent and divides by survivors; the</a:t>
+            </a:r>
+          </a:p>
+          <a:p>
+            <a:r>
+              <a:t>pressure cookers ran out on Saturday, so Sunday's file shows no sales and no row says anyone asked;</a:t>
+            </a:r>
+          </a:p>
+          <a:p>
+            <a:r>
+              <a:t>total growth of 15 percent is 2 percent like for like.</a:t>
+            </a:r>
+          </a:p>
+          <a:p>
+            <a:r>
+              <a:t>Ask: the festive lights have sold 62 percent in four weeks with Diwali ahead; good news or bad?</a:t>
+            </a:r>
+          </a:p>
+          <a:p>
+            <a:r>
+              <a:t>Collect three things to check first. Land it: a rate means nothing until you say what it is</a:t>
+            </a:r>
+          </a:p>
+          <a:p>
+            <a:r>
+              <a:t>compared with, and over which window.</a:t>
             </a:r>
           </a:p>
           <a:p>
@@ -4845,7 +4850,7 @@
           </a:p>
           <a:p>
             <a:r>
-              <a:t>Hand out the domain card now.</a:t>
+              <a:t>Keep the domain card back until the close.</a:t>
             </a:r>
           </a:p>
           <a:p>
@@ -60679,7 +60684,7 @@
                 </a:solidFill>
                 <a:latin typeface="Calibri"/>
               </a:rPr>
-              <a:t>Every metric is a numerator over a denominator in a window, and the three traps that fool most analysts are all about the bottom half of that fraction.</a:t>
+              <a:t>Every metric is a numerator over a denominator in a window, and a rate means nothing until you say what it is compared with.</a:t>
             </a:r>
           </a:p>
         </p:txBody>

--- a/content/W01/D1/slides/C2_W01_D01_half1_STUDENT.pptx
+++ b/content/W01/D1/slides/C2_W01_D01_half1_STUDENT.pptx
@@ -645,7 +645,7 @@
           </a:p>
           <a:p>
             <a:r>
-              <a:t>and each has a wrong number that looks right; an analyst is paid to catch those before a CEO acts.</a:t>
+              <a:t>and each has a wrong number that looks right; an analyst's job is to catch those before a CEO acts on one.</a:t>
             </a:r>
           </a:p>
           <a:p>
@@ -725,12 +725,12 @@
           <a:lstStyle/>
           <a:p>
             <a:r>
-              <a:t>LIVE, 30 minutes: the need (3), the options (5), the build with the TypeError (8), the trap (7),</a:t>
-            </a:r>
-          </a:p>
-          <a:p>
-            <a:r>
-              <a:t>the second route (4), Kavya's review (3). Notebook 01 is the demonstration.</a:t>
+              <a:t>LIVE, 30 minutes: the need (3), the options (5), the build (8, with 2 for the TypeError if it</a:t>
+            </a:r>
+          </a:p>
+          <a:p>
+            <a:r>
+              <a:t>happens), the trap (7), the second route (4), Kavya's review (3). Notebook 01 is the demonstration.</a:t>
             </a:r>
           </a:p>
         </p:txBody>
@@ -880,7 +880,7 @@
           <a:lstStyle/>
           <a:p>
             <a:r>
-              <a:t>LIVE, 1 minute. The company is real and the numbers are its own. The point is not Reliance; it is</a:t>
+              <a:t>LIVE, 1 minute. The company is real and the numbers are its own. The point to make is</a:t>
             </a:r>
           </a:p>
           <a:p>
@@ -1050,7 +1050,7 @@
           </a:p>
           <a:p>
             <a:r>
-              <a:t>cannot answer is worth more than one who guesses.</a:t>
+              <a:t>cannot answer saves the CEO from a guess.</a:t>
             </a:r>
           </a:p>
           <a:p>
@@ -1465,7 +1465,7 @@
           </a:p>
           <a:p>
             <a:r>
-              <a:t>up all day. The domain card goes out at the end of the day, after the room has met the traps.</a:t>
+              <a:t>up all day. The domain card goes out at the close of the afternoon, after the room has met the traps.</a:t>
             </a:r>
           </a:p>
         </p:txBody>
@@ -1535,7 +1535,7 @@
           <a:lstStyle/>
           <a:p>
             <a:r>
-              <a:t>LIVE, 2 minutes. The check is a count, not a sum. Store's 10 orders overstate its kept orders</a:t>
+              <a:t>LIVE, 2 minutes. The check counts orders before anything is summed. Store's 10 orders overstate its kept orders</a:t>
             </a:r>
           </a:p>
           <a:p>
@@ -1865,12 +1865,12 @@
           <a:lstStyle/>
           <a:p>
             <a:r>
-              <a:t>LIVE, 30 minutes: the need (3), the options (5), the build (7), the trap (8), the second route</a:t>
-            </a:r>
-          </a:p>
-          <a:p>
-            <a:r>
-              <a:t>(4), Kavya's review (3). Notebook 02 is the demonstration.</a:t>
+              <a:t>LIVE, 30 minutes: the need (3), the options (6), the build (4), the trap (9), the second route</a:t>
+            </a:r>
+          </a:p>
+          <a:p>
+            <a:r>
+              <a:t>(5), Kavya's review (3). Notebook 02 is the demonstration.</a:t>
             </a:r>
           </a:p>
         </p:txBody>
@@ -2100,7 +2100,7 @@
           <a:lstStyle/>
           <a:p>
             <a:r>
-              <a:t>LIVE, 5 minutes. The sizing here is in fields, not seconds: the file's seven fields fill A and B.</a:t>
+              <a:t>LIVE, 6 minutes. The sizing here is in fields, not seconds: the file's seven fields fill A and B.</a:t>
             </a:r>
           </a:p>
           <a:p>
@@ -2440,7 +2440,7 @@
           <a:lstStyle/>
           <a:p>
             <a:r>
-              <a:t>LIVE, 3 minutes. The answer is c. What it would mislead: marketing's payback case values each new</a:t>
+              <a:t>LIVE, 4 minutes. The answer is c. What it would mislead: marketing's payback case values each new</a:t>
             </a:r>
           </a:p>
           <a:p>
@@ -2600,7 +2600,7 @@
           <a:lstStyle/>
           <a:p>
             <a:r>
-              <a:t>LIVE, 4 minutes. The notebook asserts all three agree. The real switch is the one chapter 4</a:t>
+              <a:t>LIVE, 5 minutes. The notebook asserts all three agree. The real switch is the one chapter 4</a:t>
             </a:r>
           </a:p>
           <a:p>
@@ -2760,12 +2760,12 @@
           <a:lstStyle/>
           <a:p>
             <a:r>
-              <a:t>LIVE, 30 minutes: the need (3), the options (4), the trap (7), the build (8), the delivered</a:t>
-            </a:r>
-          </a:p>
-          <a:p>
-            <a:r>
-              <a:t>leaves (3), the second route (3), Kavya's review (2). Notebook 03 is the demonstration.</a:t>
+              <a:t>LIVE, 30 minutes: the need (3), the options (5), the build (8), the trap (9), the second route</a:t>
+            </a:r>
+          </a:p>
+          <a:p>
+            <a:r>
+              <a:t>(3), Kavya's review (2); the delivered leaves (D35) are self-study. Notebook 03 is the demonstration.</a:t>
             </a:r>
           </a:p>
         </p:txBody>
@@ -2995,7 +2995,7 @@
           <a:lstStyle/>
           <a:p>
             <a:r>
-              <a:t>LIVE, 4 minutes. B is right when only the count is needed. The switch to SQL is Week 2's.</a:t>
+              <a:t>LIVE, 5 minutes. B is right when only the count is needed. The switch to SQL is Week 2's.</a:t>
             </a:r>
           </a:p>
           <a:p>
@@ -3070,7 +3070,7 @@
           <a:lstStyle/>
           <a:p>
             <a:r>
-              <a:t>LIVE, 2 minutes. Letters by hand. Some say 16, confusing one-time with repeat.</a:t>
+              <a:t>LIVE, 3 minutes. Letters by hand. Some say 16, confusing one-time with repeat.</a:t>
             </a:r>
           </a:p>
           <a:p>
@@ -3145,7 +3145,7 @@
           <a:lstStyle/>
           <a:p>
             <a:r>
-              <a:t>LIVE, 4 minutes. Write 23 and 1.30 on the board tree. Note one repeat customer carries two</a:t>
+              <a:t>LIVE, 5 minutes. Write 23 and 1.30 on the board tree. Note one repeat customer carries two</a:t>
             </a:r>
           </a:p>
           <a:p>
@@ -3405,7 +3405,12 @@
           <a:lstStyle/>
           <a:p>
             <a:r>
-              <a:t>LIVE, 3 minutes. Present it as the case for the budget, made by a counting slip. Ask what would</a:t>
+              <a:t>LIVE, 4 minutes. Present it as the figure a colleague's first draft sent Meera before the room built the count;</a:t>
+            </a:r>
+          </a:p>
+          <a:p>
+            <a:r>
+              <a:t>the room's job is to name the check that would have caught it. Present it as the case for the budget, made by a counting slip. Ask what would</a:t>
             </a:r>
           </a:p>
           <a:p>
@@ -3485,7 +3490,7 @@
           <a:lstStyle/>
           <a:p>
             <a:r>
-              <a:t>LIVE, 4 minutes. A set keeps each value once however often it is added. The fix: 30 / 23 = 1.30</a:t>
+              <a:t>LIVE, 5 minutes. A set keeps each value once however often it is added. The fix: 30 / 23 = 1.30</a:t>
             </a:r>
           </a:p>
           <a:p>
@@ -3725,12 +3730,12 @@
           <a:lstStyle/>
           <a:p>
             <a:r>
-              <a:t>LIVE, 30 minutes after the break: the need (3), the options (5), the trap (7), the build and the</a:t>
-            </a:r>
-          </a:p>
-          <a:p>
-            <a:r>
-              <a:t>sort (8), the second route (4), Kavya's review (3). Notebook 04 is the demonstration.</a:t>
+              <a:t>LIVE, 30 minutes after the break: the need (3), the options (5), the build (5), the trap with the</a:t>
+            </a:r>
+          </a:p>
+          <a:p>
+            <a:r>
+              <a:t>sort and the fix (10), the second route (4), Kavya's review (3). Notebook 04 is the demonstration.</a:t>
             </a:r>
           </a:p>
         </p:txBody>
@@ -4035,7 +4040,7 @@
           <a:lstStyle/>
           <a:p>
             <a:r>
-              <a:t>LIVE, 4 minutes. Write Rs 2,205 on the board tree beside the pencilled Rs 18,160. The median runs</a:t>
+              <a:t>LIVE, 5 minutes. Write Rs 2,205 on the board tree beside the pencilled Rs 18,160. The median runs</a:t>
             </a:r>
           </a:p>
           <a:p>
@@ -4220,7 +4225,12 @@
           <a:lstStyle/>
           <a:p>
             <a:r>
-              <a:t>LIVE, 3 minutes. Ask first how many orders sit above the mean; most say about half. The check is</a:t>
+              <a:t>LIVE, 4 minutes. Present it as marketing's slide, which reached Meera before the room built the median; the</a:t>
+            </a:r>
+          </a:p>
+          <a:p>
+            <a:r>
+              <a:t>room's job is to name the check. Ask first how many orders sit above the mean; most say about half. The check is</a:t>
             </a:r>
           </a:p>
           <a:p>
@@ -4385,7 +4395,12 @@
           <a:lstStyle/>
           <a:p>
             <a:r>
-              <a:t>LIVE, 2 minutes. What changed: the first order in the payback falls from Rs 18,160 to Rs 2,205.</a:t>
+              <a:t>LIVE, 2 minutes. What changed: the typical order is Rs 2,205, and the slide's Rs 18,160 overstates it</a:t>
+            </a:r>
+          </a:p>
+          <a:p>
+            <a:r>
+              <a:t>eightfold. The payback itself is rebuilt on the consumer segment's mean, which chapter 5 uses.</a:t>
             </a:r>
           </a:p>
           <a:p>
@@ -8298,7 +8313,7 @@
                 </a:solidFill>
                 <a:latin typeface="Georgia"/>
               </a:rPr>
-              <a:t>01</a:t>
+              <a:t>00</a:t>
             </a:r>
           </a:p>
         </p:txBody>
@@ -8368,7 +8383,7 @@
                 </a:solidFill>
                 <a:latin typeface="Georgia"/>
               </a:rPr>
-              <a:t>02</a:t>
+              <a:t>01</a:t>
             </a:r>
           </a:p>
         </p:txBody>
@@ -8438,7 +8453,7 @@
                 </a:solidFill>
                 <a:latin typeface="Georgia"/>
               </a:rPr>
-              <a:t>03</a:t>
+              <a:t>02</a:t>
             </a:r>
           </a:p>
         </p:txBody>
@@ -8508,7 +8523,7 @@
                 </a:solidFill>
                 <a:latin typeface="Georgia"/>
               </a:rPr>
-              <a:t>04</a:t>
+              <a:t>03</a:t>
             </a:r>
           </a:p>
         </p:txBody>
@@ -8578,7 +8593,7 @@
                 </a:solidFill>
                 <a:latin typeface="Georgia"/>
               </a:rPr>
-              <a:t>05</a:t>
+              <a:t>04</a:t>
             </a:r>
           </a:p>
         </p:txBody>
@@ -28663,7 +28678,7 @@
                 </a:solidFill>
                 <a:latin typeface="Calibri"/>
               </a:rPr>
-              <a:t>The product always lands on revenue, so a wrong leaf never shows in the total; it only shows in the split.</a:t>
+              <a:t>The product always lands on revenue, so a wrong leaf never shows in the total and shows only in the split.</a:t>
             </a:r>
           </a:p>
         </p:txBody>
@@ -30197,46 +30212,7 @@
       </p:pic>
       <p:sp>
         <p:nvSpPr>
-          <p:cNvPr id="10" name="TextBox 9"/>
-          <p:cNvSpPr txBox="1"/>
-          <p:nvPr/>
-        </p:nvSpPr>
-        <p:spPr>
-          <a:xfrm>
-            <a:off x="530352" y="4412208"/>
-            <a:ext cx="11130991" cy="772160"/>
-          </a:xfrm>
-          <a:prstGeom prst="rect">
-            <a:avLst/>
-          </a:prstGeom>
-          <a:noFill/>
-        </p:spPr>
-        <p:txBody>
-          <a:bodyPr wrap="square" anchor="t" lIns="0" rIns="0" tIns="0" bIns="0">
-            <a:spAutoFit/>
-          </a:bodyPr>
-          <a:lstStyle/>
-          <a:p>
-            <a:pPr>
-              <a:spcAft>
-                <a:spcPts val="800"/>
-              </a:spcAft>
-            </a:pPr>
-            <a:r>
-              <a:rPr sz="1600" b="0" i="0">
-                <a:solidFill>
-                  <a:srgbClr val="1A1440"/>
-                </a:solidFill>
-                <a:latin typeface="Calibri"/>
-              </a:rPr>
-              <a:t>The store sees 1,200 people and 480 bills of Rs 1,250; the app sees 50,000 people, 8,000 carts and 2,000 orders of Rs 1,600. Every number here is illustrative.</a:t>
-            </a:r>
-          </a:p>
-        </p:txBody>
-      </p:sp>
-      <p:sp>
-        <p:nvSpPr>
-          <p:cNvPr id="11" name="Oval 10"/>
+          <p:cNvPr id="10" name="Oval 9"/>
           <p:cNvSpPr/>
           <p:nvPr/>
         </p:nvSpPr>
@@ -30280,7 +30256,7 @@
       </p:sp>
       <p:sp>
         <p:nvSpPr>
-          <p:cNvPr id="12" name="TextBox 11"/>
+          <p:cNvPr id="11" name="TextBox 10"/>
           <p:cNvSpPr txBox="1"/>
           <p:nvPr/>
         </p:nvSpPr>
@@ -30315,7 +30291,7 @@
       </p:sp>
       <p:sp>
         <p:nvSpPr>
-          <p:cNvPr id="13" name="Oval 12"/>
+          <p:cNvPr id="12" name="Oval 11"/>
           <p:cNvSpPr/>
           <p:nvPr/>
         </p:nvSpPr>
@@ -30359,7 +30335,7 @@
       </p:sp>
       <p:sp>
         <p:nvSpPr>
-          <p:cNvPr id="14" name="TextBox 13"/>
+          <p:cNvPr id="13" name="TextBox 12"/>
           <p:cNvSpPr txBox="1"/>
           <p:nvPr/>
         </p:nvSpPr>
@@ -30394,7 +30370,7 @@
       </p:sp>
       <p:sp>
         <p:nvSpPr>
-          <p:cNvPr id="15" name="Oval 14"/>
+          <p:cNvPr id="14" name="Oval 13"/>
           <p:cNvSpPr/>
           <p:nvPr/>
         </p:nvSpPr>
@@ -30438,7 +30414,7 @@
       </p:sp>
       <p:sp>
         <p:nvSpPr>
-          <p:cNvPr id="16" name="TextBox 15"/>
+          <p:cNvPr id="15" name="TextBox 14"/>
           <p:cNvSpPr txBox="1"/>
           <p:nvPr/>
         </p:nvSpPr>
@@ -30473,7 +30449,7 @@
       </p:sp>
       <p:sp>
         <p:nvSpPr>
-          <p:cNvPr id="17" name="Oval 16"/>
+          <p:cNvPr id="16" name="Oval 15"/>
           <p:cNvSpPr/>
           <p:nvPr/>
         </p:nvSpPr>
@@ -30517,7 +30493,7 @@
       </p:sp>
       <p:sp>
         <p:nvSpPr>
-          <p:cNvPr id="18" name="TextBox 17"/>
+          <p:cNvPr id="17" name="TextBox 16"/>
           <p:cNvSpPr txBox="1"/>
           <p:nvPr/>
         </p:nvSpPr>
@@ -30552,7 +30528,7 @@
       </p:sp>
       <p:sp>
         <p:nvSpPr>
-          <p:cNvPr id="19" name="Oval 18"/>
+          <p:cNvPr id="18" name="Oval 17"/>
           <p:cNvSpPr/>
           <p:nvPr/>
         </p:nvSpPr>
@@ -30596,7 +30572,7 @@
       </p:sp>
       <p:sp>
         <p:nvSpPr>
-          <p:cNvPr id="20" name="TextBox 19"/>
+          <p:cNvPr id="19" name="TextBox 18"/>
           <p:cNvSpPr txBox="1"/>
           <p:nvPr/>
         </p:nvSpPr>
@@ -30631,7 +30607,7 @@
       </p:sp>
       <p:sp>
         <p:nvSpPr>
-          <p:cNvPr id="21" name="TextBox 20"/>
+          <p:cNvPr id="20" name="TextBox 19"/>
           <p:cNvSpPr txBox="1"/>
           <p:nvPr/>
         </p:nvSpPr>
@@ -32159,7 +32135,7 @@
                 </a:solidFill>
                 <a:latin typeface="Georgia"/>
               </a:rPr>
-              <a:t>The check: orders x AOV must land on its revenue</a:t>
+              <a:t>Check: AOV x the orders summed gives revenue</a:t>
             </a:r>
           </a:p>
         </p:txBody>
@@ -32209,7 +32185,7 @@
         </p:nvGraphicFramePr>
         <p:xfrm>
           <a:off x="530352" y="1956816"/>
-          <a:ext cx="11130988" cy="1341120"/>
+          <a:ext cx="11130989" cy="1341120"/>
         </p:xfrm>
         <a:graphic>
           <a:graphicData uri="http://schemas.openxmlformats.org/drawingml/2006/table">
@@ -32218,10 +32194,10 @@
                 <a:tableStyleId>{2D5ABB26-0587-4C30-8999-92F81FD0307C}</a:tableStyleId>
               </a:tblPr>
               <a:tblGrid>
-                <a:gridCol w="3342034"/>
-                <a:gridCol w="1655742"/>
-                <a:gridCol w="2279670"/>
-                <a:gridCol w="3853542"/>
+                <a:gridCol w="2576880"/>
+                <a:gridCol w="1276662"/>
+                <a:gridCol w="4063461"/>
+                <a:gridCol w="3213986"/>
               </a:tblGrid>
               <a:tr h="335280">
                 <a:tc>
@@ -32280,7 +32256,7 @@
                           </a:solidFill>
                           <a:latin typeface="Calibri"/>
                         </a:rPr>
-                        <a:t>Orders x AOV</a:t>
+                        <a:t>x the orders the revenue covers</a:t>
                       </a:r>
                     </a:p>
                   </a:txBody>
@@ -32302,7 +32278,7 @@
                           </a:solidFill>
                           <a:latin typeface="Calibri"/>
                         </a:rPr>
-                        <a:t>Lands on a real total?</a:t>
+                        <a:t>Gives that revenue back?</a:t>
                       </a:r>
                     </a:p>
                   </a:txBody>
@@ -34568,7 +34544,7 @@
       </p:sp>
       <p:pic>
         <p:nvPicPr>
-          <p:cNvPr id="9" name="mermaid diagram" descr="f221faf6addfdea8.png"/>
+          <p:cNvPr id="9" name="mermaid diagram" descr="bf29fd3e72f3b937.png"/>
           <p:cNvPicPr>
             <a:picLocks noChangeAspect="1"/>
           </p:cNvPicPr>
@@ -34582,8 +34558,8 @@
         </p:blipFill>
         <p:spPr>
           <a:xfrm>
-            <a:off x="530352" y="2618754"/>
-            <a:ext cx="4786326" cy="2644618"/>
+            <a:off x="2690150" y="1664208"/>
+            <a:ext cx="6811395" cy="2295144"/>
           </a:xfrm>
           <a:prstGeom prst="rect">
             <a:avLst/>
@@ -34598,8 +34574,8 @@
         </p:nvSpPr>
         <p:spPr>
           <a:xfrm>
-            <a:off x="5761917" y="1956816"/>
-            <a:ext cx="5899425" cy="1380744"/>
+            <a:off x="530352" y="4005072"/>
+            <a:ext cx="11130991" cy="1121664"/>
           </a:xfrm>
           <a:prstGeom prst="roundRect">
             <a:avLst>
@@ -34652,7 +34628,7 @@
         </p:nvSpPr>
         <p:spPr>
           <a:xfrm>
-            <a:off x="5990517" y="2418588"/>
+            <a:off x="758952" y="4337304"/>
             <a:ext cx="457200" cy="457200"/>
           </a:xfrm>
           <a:prstGeom prst="ellipse">
@@ -34704,7 +34680,7 @@
         </p:blipFill>
         <p:spPr>
           <a:xfrm>
-            <a:off x="6100245" y="2528316"/>
+            <a:off x="868680" y="4447032"/>
             <a:ext cx="237744" cy="237744"/>
           </a:xfrm>
           <a:prstGeom prst="rect">
@@ -34720,8 +34696,8 @@
         </p:nvSpPr>
         <p:spPr>
           <a:xfrm>
-            <a:off x="6630597" y="2103120"/>
-            <a:ext cx="4756425" cy="160401"/>
+            <a:off x="1399031" y="4151376"/>
+            <a:ext cx="9987991" cy="160401"/>
           </a:xfrm>
           <a:prstGeom prst="rect">
             <a:avLst/>
@@ -34755,8 +34731,8 @@
         </p:nvSpPr>
         <p:spPr>
           <a:xfrm>
-            <a:off x="6630597" y="2322576"/>
-            <a:ext cx="4756425" cy="941832"/>
+            <a:off x="1399031" y="4370832"/>
+            <a:ext cx="9987991" cy="682752"/>
           </a:xfrm>
           <a:prstGeom prst="rect">
             <a:avLst/>
@@ -34789,8 +34765,8 @@
         </p:nvSpPr>
         <p:spPr>
           <a:xfrm>
-            <a:off x="5761917" y="3502152"/>
-            <a:ext cx="5899425" cy="1121664"/>
+            <a:off x="530352" y="5291328"/>
+            <a:ext cx="11130991" cy="862584"/>
           </a:xfrm>
           <a:prstGeom prst="roundRect">
             <a:avLst>
@@ -34843,7 +34819,7 @@
         </p:nvSpPr>
         <p:spPr>
           <a:xfrm>
-            <a:off x="5990517" y="3834384"/>
+            <a:off x="758952" y="5494020"/>
             <a:ext cx="457200" cy="457200"/>
           </a:xfrm>
           <a:prstGeom prst="ellipse">
@@ -34895,7 +34871,7 @@
         </p:blipFill>
         <p:spPr>
           <a:xfrm>
-            <a:off x="6100245" y="3944112"/>
+            <a:off x="868680" y="5603748"/>
             <a:ext cx="237744" cy="237744"/>
           </a:xfrm>
           <a:prstGeom prst="rect">
@@ -34911,8 +34887,8 @@
         </p:nvSpPr>
         <p:spPr>
           <a:xfrm>
-            <a:off x="6630597" y="3648456"/>
-            <a:ext cx="4756425" cy="160401"/>
+            <a:off x="1399031" y="5437632"/>
+            <a:ext cx="9987991" cy="160401"/>
           </a:xfrm>
           <a:prstGeom prst="rect">
             <a:avLst/>
@@ -34946,8 +34922,8 @@
         </p:nvSpPr>
         <p:spPr>
           <a:xfrm>
-            <a:off x="6630597" y="3867912"/>
-            <a:ext cx="4756425" cy="682752"/>
+            <a:off x="1399031" y="5657088"/>
+            <a:ext cx="9987991" cy="423672"/>
           </a:xfrm>
           <a:prstGeom prst="rect">
             <a:avLst/>
@@ -49058,7 +49034,7 @@
                           </a:solidFill>
                           <a:latin typeface="Calibri"/>
                         </a:rPr>
-                        <a:t>The typical order, which the acquisition payback is priced on</a:t>
+                        <a:t>The typical order, which marketing's payback credits to every new customer</a:t>
                       </a:r>
                     </a:p>
                   </a:txBody>
@@ -55652,7 +55628,7 @@
                 </a:solidFill>
                 <a:latin typeface="Calibri"/>
               </a:rPr>
-              <a:t>Every amount drawn as a dot, on a scale where each step is ten times the last.</a:t>
+              <a:t>Notebook 04 draws every amount as a dot; here, where they sit against the mean.</a:t>
             </a:r>
           </a:p>
         </p:txBody>
@@ -56605,7 +56581,7 @@
                 </a:solidFill>
                 <a:latin typeface="Calibri"/>
               </a:rPr>
-              <a:t>MORE ORDERS</a:t>
+              <a:t>OVERSTATED</a:t>
             </a:r>
           </a:p>
         </p:txBody>
@@ -56640,7 +56616,7 @@
                 </a:solidFill>
                 <a:latin typeface="Calibri"/>
               </a:rPr>
-              <a:t>for the payback than the slide implied</a:t>
+              <a:t>a typical order, credited at the mean</a:t>
             </a:r>
           </a:p>
         </p:txBody>
@@ -56875,7 +56851,7 @@
                 </a:solidFill>
                 <a:latin typeface="Calibri"/>
               </a:rPr>
-              <a:t>Report the median for the typical order and the mean for the total, and say which order separates them. A payback priced on Rs 2,205 needs about eight times as many orders as one priced on the mean.</a:t>
+              <a:t>Report the median for the typical order and the mean for the total, and say which order separates them. A payback needs a mean, from the segment the spend targets, with the bulk order set aside.</a:t>
             </a:r>
           </a:p>
         </p:txBody>
@@ -59747,7 +59723,7 @@
       </p:sp>
       <p:pic>
         <p:nvPicPr>
-          <p:cNvPr id="9" name="mermaid diagram" descr="a003051779a4654c.png"/>
+          <p:cNvPr id="9" name="mermaid diagram" descr="99238c27f1d2b5ed.png"/>
           <p:cNvPicPr>
             <a:picLocks noChangeAspect="1"/>
           </p:cNvPicPr>
@@ -59761,8 +59737,8 @@
         </p:blipFill>
         <p:spPr>
           <a:xfrm>
-            <a:off x="3000035" y="1664208"/>
-            <a:ext cx="6191625" cy="3808984"/>
+            <a:off x="2129075" y="1682496"/>
+            <a:ext cx="7933544" cy="4517136"/>
           </a:xfrm>
           <a:prstGeom prst="rect">
             <a:avLst/>
@@ -59771,41 +59747,7 @@
       </p:pic>
       <p:sp>
         <p:nvSpPr>
-          <p:cNvPr id="10" name="TextBox 9"/>
-          <p:cNvSpPr txBox="1"/>
-          <p:nvPr/>
-        </p:nvSpPr>
-        <p:spPr>
-          <a:xfrm>
-            <a:off x="530352" y="5518912"/>
-            <a:ext cx="11130991" cy="680720"/>
-          </a:xfrm>
-          <a:prstGeom prst="rect">
-            <a:avLst/>
-          </a:prstGeom>
-          <a:noFill/>
-        </p:spPr>
-        <p:txBody>
-          <a:bodyPr wrap="square" anchor="t" lIns="0" rIns="0" tIns="0" bIns="0">
-            <a:spAutoFit/>
-          </a:bodyPr>
-          <a:lstStyle/>
-          <a:p>
-            <a:r>
-              <a:rPr sz="1600" b="0" i="0">
-                <a:solidFill>
-                  <a:srgbClr val="1A1440"/>
-                </a:solidFill>
-                <a:latin typeface="Calibri"/>
-              </a:rPr>
-              <a:t>Each asks for a different number, and each loses something different when it is wrong: Anand a restated figure, marketing a wasted budget.</a:t>
-            </a:r>
-          </a:p>
-        </p:txBody>
-      </p:sp>
-      <p:sp>
-        <p:nvSpPr>
-          <p:cNvPr id="11" name="Oval 10"/>
+          <p:cNvPr id="10" name="Oval 9"/>
           <p:cNvSpPr/>
           <p:nvPr/>
         </p:nvSpPr>
@@ -59849,7 +59791,7 @@
       </p:sp>
       <p:sp>
         <p:nvSpPr>
-          <p:cNvPr id="12" name="TextBox 11"/>
+          <p:cNvPr id="11" name="TextBox 10"/>
           <p:cNvSpPr txBox="1"/>
           <p:nvPr/>
         </p:nvSpPr>
@@ -59884,7 +59826,7 @@
       </p:sp>
       <p:sp>
         <p:nvSpPr>
-          <p:cNvPr id="13" name="Oval 12"/>
+          <p:cNvPr id="12" name="Oval 11"/>
           <p:cNvSpPr/>
           <p:nvPr/>
         </p:nvSpPr>
@@ -59928,7 +59870,7 @@
       </p:sp>
       <p:sp>
         <p:nvSpPr>
-          <p:cNvPr id="14" name="TextBox 13"/>
+          <p:cNvPr id="13" name="TextBox 12"/>
           <p:cNvSpPr txBox="1"/>
           <p:nvPr/>
         </p:nvSpPr>
@@ -59963,7 +59905,7 @@
       </p:sp>
       <p:sp>
         <p:nvSpPr>
-          <p:cNvPr id="15" name="Oval 14"/>
+          <p:cNvPr id="14" name="Oval 13"/>
           <p:cNvSpPr/>
           <p:nvPr/>
         </p:nvSpPr>
@@ -60007,7 +59949,7 @@
       </p:sp>
       <p:sp>
         <p:nvSpPr>
-          <p:cNvPr id="16" name="TextBox 15"/>
+          <p:cNvPr id="15" name="TextBox 14"/>
           <p:cNvSpPr txBox="1"/>
           <p:nvPr/>
         </p:nvSpPr>
@@ -60042,7 +59984,7 @@
       </p:sp>
       <p:sp>
         <p:nvSpPr>
-          <p:cNvPr id="17" name="Oval 16"/>
+          <p:cNvPr id="16" name="Oval 15"/>
           <p:cNvSpPr/>
           <p:nvPr/>
         </p:nvSpPr>
@@ -60086,7 +60028,7 @@
       </p:sp>
       <p:sp>
         <p:nvSpPr>
-          <p:cNvPr id="18" name="TextBox 17"/>
+          <p:cNvPr id="17" name="TextBox 16"/>
           <p:cNvSpPr txBox="1"/>
           <p:nvPr/>
         </p:nvSpPr>
@@ -60121,7 +60063,7 @@
       </p:sp>
       <p:sp>
         <p:nvSpPr>
-          <p:cNvPr id="19" name="Oval 18"/>
+          <p:cNvPr id="18" name="Oval 17"/>
           <p:cNvSpPr/>
           <p:nvPr/>
         </p:nvSpPr>
@@ -60165,7 +60107,7 @@
       </p:sp>
       <p:sp>
         <p:nvSpPr>
-          <p:cNvPr id="20" name="TextBox 19"/>
+          <p:cNvPr id="19" name="TextBox 18"/>
           <p:cNvSpPr txBox="1"/>
           <p:nvPr/>
         </p:nvSpPr>
@@ -60200,7 +60142,7 @@
       </p:sp>
       <p:sp>
         <p:nvSpPr>
-          <p:cNvPr id="21" name="TextBox 20"/>
+          <p:cNvPr id="20" name="TextBox 19"/>
           <p:cNvSpPr txBox="1"/>
           <p:nvPr/>
         </p:nvSpPr>
@@ -60476,7 +60418,7 @@
       </p:sp>
       <p:pic>
         <p:nvPicPr>
-          <p:cNvPr id="9" name="mermaid diagram" descr="33499a9c0e62bdb3.png"/>
+          <p:cNvPr id="9" name="mermaid diagram" descr="ced87dd3731c1260.png"/>
           <p:cNvPicPr>
             <a:picLocks noChangeAspect="1"/>
           </p:cNvPicPr>
@@ -60490,8 +60432,8 @@
         </p:blipFill>
         <p:spPr>
           <a:xfrm>
-            <a:off x="3109174" y="1664208"/>
-            <a:ext cx="5973346" cy="3203447"/>
+            <a:off x="2821994" y="1664208"/>
+            <a:ext cx="6547706" cy="3203447"/>
           </a:xfrm>
           <a:prstGeom prst="rect">
             <a:avLst/>

--- a/content/W01/D1/slides/C2_W01_D01_half1_STUDENT.pptx
+++ b/content/W01/D1/slides/C2_W01_D01_half1_STUDENT.pptx
@@ -553,7 +553,7 @@
           <a:lstStyle/>
           <a:p>
             <a:r>
-              <a:t>LIVE, 1 minute. Leave Meera's words on screen while the room settles, and do not read them yet:</a:t>
+              <a:t>On screen before the clock starts. Leave Meera's words up while the room settles, and do not read them yet:</a:t>
             </a:r>
           </a:p>
           <a:p>
@@ -2363,7 +2363,12 @@
           </a:p>
           <a:p>
             <a:r>
-              <a:t>Rs 1,800 paid with a card held as a token; the bedsheet comes back next week.</a:t>
+              <a:t>Rs 1,800 paid with a card held as a token; the bedsheet comes back next week. The app's 2,000</a:t>
+            </a:r>
+          </a:p>
+          <a:p>
+            <a:r>
+              <a:t>orders average Rs 1,500.</a:t>
             </a:r>
           </a:p>
           <a:p>
@@ -2378,7 +2383,7 @@
           </a:p>
           <a:p>
             <a:r>
-              <a:t>Draw the value chain on the board, left to right.</a:t>
+              <a:t>Draw the value chain on the board, six boxes left to right.</a:t>
             </a:r>
           </a:p>
           <a:p>
@@ -2698,7 +2703,7 @@
           </a:p>
           <a:p>
             <a:r>
-              <a:t>(3), Kavya's review (2); the delivered leaves (D35) are self-study. Notebook 03 is the demonstration.</a:t>
+              <a:t>(3), Kavya's review (2); the delivered leaves sit in S35's notes; cut them first. Notebook 03 is the demonstration.</a:t>
             </a:r>
           </a:p>
         </p:txBody>
@@ -3243,32 +3248,37 @@
           <a:lstStyle/>
           <a:p>
             <a:r>
-              <a:t>LIVE, 7 minutes. Part 2 of the talk track. Kalpa is fictional; these are real companies that look</a:t>
-            </a:r>
-          </a:p>
-          <a:p>
-            <a:r>
-              <a:t>like parts of it, and every fact about them is in the talk track's facts table with its source.</a:t>
-            </a:r>
-          </a:p>
-          <a:p>
-            <a:r>
-              <a:t>The GCC you have joined works like the Indian centres of Walmart, Target, Tesco and Lowe's.</a:t>
-            </a:r>
-          </a:p>
-          <a:p>
-            <a:r>
-              <a:t>Ask: name one Indian group that sells you something, lends you money and connects your phone.</a:t>
-            </a:r>
-          </a:p>
-          <a:p>
-            <a:r>
-              <a:t>Land it: a group's units share a customer and a brand, and each keeps its own books.</a:t>
-            </a:r>
-          </a:p>
-          <a:p>
-            <a:r>
-              <a:t>Draw the group on the board.</a:t>
+              <a:t>LIVE, 7 minutes. Part 2 of the talk track. Ask first: what does your phone company know about you</a:t>
+            </a:r>
+          </a:p>
+          <a:p>
+            <a:r>
+              <a:t>that a grocer would want? Land it: units that share customers can learn a great deal about each</a:t>
+            </a:r>
+          </a:p>
+          <a:p>
+            <a:r>
+              <a:t>one, and each unit keeps its own books and needs its own purpose before it uses the data.</a:t>
+            </a:r>
+          </a:p>
+          <a:p>
+            <a:r>
+              <a:t>Kalpa is fictional; Reliance and Tata are real groups built like it, and every fact about them is</a:t>
+            </a:r>
+          </a:p>
+          <a:p>
+            <a:r>
+              <a:t>in the talk track's facts table with its source. The GCC you have joined works like the Indian</a:t>
+            </a:r>
+          </a:p>
+          <a:p>
+            <a:r>
+              <a:t>centres of Walmart, Target, Tesco and Lowe's.</a:t>
+            </a:r>
+          </a:p>
+          <a:p>
+            <a:r>
+              <a:t>Draw the group on the board, six boxes.</a:t>
             </a:r>
           </a:p>
           <a:p>
@@ -4148,17 +4158,42 @@
           <a:lstStyle/>
           <a:p>
             <a:r>
-              <a:t>LIVE, 10 minutes. Part 3 of the talk track, the part never to cut. Illustrative numbers.</a:t>
-            </a:r>
-          </a:p>
-          <a:p>
-            <a:r>
-              <a:t>Ask first: of the member's Rs 1,800, how much does Kalpa keep as operating profit? Four ranges,</a:t>
-            </a:r>
-          </a:p>
-          <a:p>
-            <a:r>
-              <a:t>hands up for each; then reveal about Rs 45. Real retailers keep a thin slice: DMart reported</a:t>
+              <a:t>LIVE, 10 minutes. Part 3 of the talk track, the part never to cut. Illustrative numbers. The slide lays the board's six boxes</a:t>
+            </a:r>
+          </a:p>
+          <a:p>
+            <a:r>
+              <a:t>left to right; on the board, draw them top to bottom and write each deduction on its arrow: cancellations and returns come off first; GST is collected for the state;</a:t>
+            </a:r>
+          </a:p>
+          <a:p>
+            <a:r>
+              <a:t>the cost of the goods goes to suppliers; per-order costs are picking, delivery, payment fees,</a:t>
+            </a:r>
+          </a:p>
+          <a:p>
+            <a:r>
+              <a:t>returns and the offers that bring a customer back; fixed costs are stores, warehouses,</a:t>
+            </a:r>
+          </a:p>
+          <a:p>
+            <a:r>
+              <a:t>technology, head office and the budget that wins new customers.</a:t>
+            </a:r>
+          </a:p>
+          <a:p>
+            <a:r>
+              <a:t>Ask first: of the member's Rs 1,800, how much does Kalpa keep as EBITDA? Four ranges, hands up</a:t>
+            </a:r>
+          </a:p>
+          <a:p>
+            <a:r>
+              <a:t>for each; then reveal about Rs 50, the basket's Rs 150 of contribution less about Rs 100 towards</a:t>
+            </a:r>
+          </a:p>
+          <a:p>
+            <a:r>
+              <a:t>the costs that do not change with one more order. Real retailers keep a thin slice: DMart reported</a:t>
             </a:r>
           </a:p>
           <a:p>
@@ -4173,12 +4208,12 @@
           </a:p>
           <a:p>
             <a:r>
-              <a:t>e-commerce selling to Indian consumers runs that way under Press Note 2 of 2018.</a:t>
-            </a:r>
-          </a:p>
-          <a:p>
-            <a:r>
-              <a:t>Draw Rs 100's journey top to bottom.</a:t>
+              <a:t>multi-brand e-commerce selling to Indian consumers runs that way under Press Note 2 of 2018.</a:t>
+            </a:r>
+          </a:p>
+          <a:p>
+            <a:r>
+              <a:t>Draw Rs 100's journey top to bottom, six boxes, each deduction on its arrow.</a:t>
             </a:r>
           </a:p>
           <a:p>
@@ -4488,32 +4523,42 @@
           <a:lstStyle/>
           <a:p>
             <a:r>
-              <a:t>LIVE, 6 minutes. Part 4 of the talk track. Name the six: Meera, Anand, the marketing lead, the head</a:t>
-            </a:r>
-          </a:p>
-          <a:p>
-            <a:r>
-              <a:t>of Retail-Plus, the data platform lead, and Kavya Nair, who reviews everything before it leaves.</a:t>
-            </a:r>
-          </a:p>
-          <a:p>
-            <a:r>
-              <a:t>Farhan Sheikh arrives in Week 8.</a:t>
-            </a:r>
-          </a:p>
-          <a:p>
-            <a:r>
-              <a:t>Ask: which of them loses the most if our number is wrong? Every answer is defensible; the point</a:t>
-            </a:r>
-          </a:p>
-          <a:p>
-            <a:r>
-              <a:t>is that each loses something different.</a:t>
-            </a:r>
-          </a:p>
-          <a:p>
-            <a:r>
-              <a:t>Draw who asks on the board. If short of time, draw it, ask once and move on.</a:t>
+              <a:t>LIVE, 6 minutes. Part 4 of the talk track. Name the six boxes: Meera, Anand, the marketing lead, the</a:t>
+            </a:r>
+          </a:p>
+          <a:p>
+            <a:r>
+              <a:t>head of Retail-Plus, the other functions (buying, pricing, supply chain, stores, and support, where</a:t>
+            </a:r>
+          </a:p>
+          <a:p>
+            <a:r>
+              <a:t>Farhan Sheikh arrives in Week 8), and Kavya Nair with us in the GCC, who reviews everything before</a:t>
+            </a:r>
+          </a:p>
+          <a:p>
+            <a:r>
+              <a:t>it leaves. The data platform lead sits beside the GCC and wants the warehouse queried, never exported.</a:t>
+            </a:r>
+          </a:p>
+          <a:p>
+            <a:r>
+              <a:t>Ask: if one of our numbers is wrong, whose mistake can we undo next week, and whose can we not?</a:t>
+            </a:r>
+          </a:p>
+          <a:p>
+            <a:r>
+              <a:t>Land it: before a number leaves the team, know who asked for it and whether being wrong can be</a:t>
+            </a:r>
+          </a:p>
+          <a:p>
+            <a:r>
+              <a:t>taken back.</a:t>
+            </a:r>
+          </a:p>
+          <a:p>
+            <a:r>
+              <a:t>Draw who asks on the board, six boxes. If short of time, draw it, ask once and move on.</a:t>
             </a:r>
           </a:p>
           <a:p>
@@ -4623,7 +4668,12 @@
           </a:p>
           <a:p>
             <a:r>
-              <a:t>Draw the metric tree and leave it on the board all day; the case writes its numbers onto it.</a:t>
+              <a:t>Draw the metric tree, six boxes, and leave it on the board all day; the case writes its numbers</a:t>
+            </a:r>
+          </a:p>
+          <a:p>
+            <a:r>
+              <a:t>onto it.</a:t>
             </a:r>
           </a:p>
           <a:p>
@@ -14072,7 +14122,7 @@
                 </a:solidFill>
                 <a:latin typeface="Calibri"/>
               </a:rPr>
-              <a:t>The dashed box is an answer too: the file cannot say what sales were after discounts.</a:t>
+              <a:t>The file has no discount field, so sales after discounts cannot be computed from it.</a:t>
             </a:r>
           </a:p>
         </p:txBody>
@@ -30016,7 +30066,7 @@
       </p:sp>
       <p:pic>
         <p:nvPicPr>
-          <p:cNvPr id="9" name="mermaid diagram" descr="4f3d50a320b6da1f.png"/>
+          <p:cNvPr id="9" name="mermaid diagram" descr="3f8161a49132def9.png"/>
           <p:cNvPicPr>
             <a:picLocks noChangeAspect="1"/>
           </p:cNvPicPr>
@@ -30030,8 +30080,8 @@
         </p:blipFill>
         <p:spPr>
           <a:xfrm>
-            <a:off x="530352" y="1956816"/>
-            <a:ext cx="11130991" cy="2309088"/>
+            <a:off x="780897" y="1956816"/>
+            <a:ext cx="10629900" cy="3043237"/>
           </a:xfrm>
           <a:prstGeom prst="rect">
             <a:avLst/>
@@ -41720,14 +41770,14 @@
                 </a:solidFill>
                 <a:latin typeface="Calibri"/>
               </a:rPr>
-              <a:t>One group, five units, and one data and AI centre in Bengaluru serving all five.</a:t>
+              <a:t>One group, five units, and one data and AI centre in Bengaluru serving each of them.</a:t>
             </a:r>
           </a:p>
         </p:txBody>
       </p:sp>
       <p:pic>
         <p:nvPicPr>
-          <p:cNvPr id="9" name="mermaid diagram" descr="5aa8295a1d81704a.png"/>
+          <p:cNvPr id="9" name="mermaid diagram" descr="f3348aaf59c80f92.png"/>
           <p:cNvPicPr>
             <a:picLocks noChangeAspect="1"/>
           </p:cNvPicPr>
@@ -41741,8 +41791,8 @@
         </p:blipFill>
         <p:spPr>
           <a:xfrm>
-            <a:off x="530352" y="1956816"/>
-            <a:ext cx="11130991" cy="2904747"/>
+            <a:off x="2081847" y="1664208"/>
+            <a:ext cx="8028000" cy="3808984"/>
           </a:xfrm>
           <a:prstGeom prst="rect">
             <a:avLst/>
@@ -41757,25 +41807,20 @@
         </p:nvSpPr>
         <p:spPr>
           <a:xfrm>
-            <a:off x="530352" y="5007867"/>
-            <a:ext cx="11130991" cy="772160"/>
-          </a:xfrm>
-          <a:prstGeom prst="rect">
-            <a:avLst/>
-          </a:prstGeom>
-          <a:noFill/>
-        </p:spPr>
-        <p:txBody>
-          <a:bodyPr wrap="square" anchor="t" lIns="0" rIns="0" tIns="0" bIns="0">
-            <a:spAutoFit/>
-          </a:bodyPr>
-          <a:lstStyle/>
-          <a:p>
-            <a:pPr>
-              <a:spcAft>
-                <a:spcPts val="800"/>
-              </a:spcAft>
-            </a:pPr>
+            <a:off x="530352" y="5518912"/>
+            <a:ext cx="11130991" cy="680720"/>
+          </a:xfrm>
+          <a:prstGeom prst="rect">
+            <a:avLst/>
+          </a:prstGeom>
+          <a:noFill/>
+        </p:spPr>
+        <p:txBody>
+          <a:bodyPr wrap="square" anchor="t" lIns="0" rIns="0" tIns="0" bIns="0">
+            <a:spAutoFit/>
+          </a:bodyPr>
+          <a:lstStyle/>
+          <a:p>
             <a:r>
               <a:rPr sz="1600" b="0" i="0">
                 <a:solidFill>
@@ -41783,7 +41828,7 @@
                 </a:solidFill>
                 <a:latin typeface="Calibri"/>
               </a:rPr>
-              <a:t>Kalpa Retail sits between store chains such as DMart, marketplaces such as Flipkart and Amazon India, and quick commerce such as Blinkit.</a:t>
+              <a:t>Kalpa's stores work like DMart's, and its app sells stock Kalpa owns, like DMart Ready; Flipkart and Amazon India are marketplaces whose sellers own the goods.</a:t>
             </a:r>
           </a:p>
         </p:txBody>
@@ -49825,7 +49870,7 @@
                 </a:solidFill>
                 <a:latin typeface="Calibri"/>
               </a:rPr>
-              <a:t>Two middles this far apart are a finding in themselves.</a:t>
+              <a:t>When the mean is eight times the median, sort the file before quoting either.</a:t>
             </a:r>
           </a:p>
         </p:txBody>
@@ -52340,7 +52385,7 @@
                 </a:solidFill>
                 <a:latin typeface="Georgia"/>
               </a:rPr>
-              <a:t>Rs 100 ordered leaves Rs 2.50 of profit</a:t>
+              <a:t>Rs 100 ordered leaves Rs 2.50 of EBITDA</a:t>
             </a:r>
           </a:p>
         </p:txBody>
@@ -52375,14 +52420,14 @@
                 </a:solidFill>
                 <a:latin typeface="Calibri"/>
               </a:rPr>
-              <a:t>GMV walks down to net revenue, gross margin, contribution and operating profit.</a:t>
+              <a:t>EBITDA is earnings before interest, tax, depreciation and amortisation: what the Rs 100 leaves.</a:t>
             </a:r>
           </a:p>
         </p:txBody>
       </p:sp>
       <p:pic>
         <p:nvPicPr>
-          <p:cNvPr id="9" name="mermaid diagram" descr="c167423c82f9f5b5.png"/>
+          <p:cNvPr id="9" name="mermaid diagram" descr="dc597e71f1d37b50.png"/>
           <p:cNvPicPr>
             <a:picLocks noChangeAspect="1"/>
           </p:cNvPicPr>
@@ -52397,7 +52442,7 @@
         <p:spPr>
           <a:xfrm>
             <a:off x="530352" y="1956816"/>
-            <a:ext cx="11130991" cy="937450"/>
+            <a:ext cx="11130991" cy="577551"/>
           </a:xfrm>
           <a:prstGeom prst="rect">
             <a:avLst/>
@@ -52413,8 +52458,8 @@
           <p:nvPr/>
         </p:nvGraphicFramePr>
         <p:xfrm>
-          <a:off x="530352" y="3040570"/>
-          <a:ext cx="11130990" cy="2218944"/>
+          <a:off x="530352" y="2680671"/>
+          <a:ext cx="11130990" cy="2702560"/>
         </p:xfrm>
         <a:graphic>
           <a:graphicData uri="http://schemas.openxmlformats.org/drawingml/2006/table">
@@ -52423,9 +52468,9 @@
                 <a:tableStyleId>{2D5ABB26-0587-4C30-8999-92F81FD0307C}</a:tableStyleId>
               </a:tblPr>
               <a:tblGrid>
-                <a:gridCol w="3702865"/>
+                <a:gridCol w="3416144"/>
                 <a:gridCol w="914400"/>
-                <a:gridCol w="6513725"/>
+                <a:gridCol w="6800446"/>
               </a:tblGrid>
               <a:tr h="369824">
                 <a:tc>
@@ -52552,7 +52597,7 @@
                           </a:solidFill>
                           <a:latin typeface="Calibri"/>
                         </a:rPr>
-                        <a:t>The cancellations and returns come off first.</a:t>
+                        <a:t>Cancellations and returns come off first.</a:t>
                       </a:r>
                     </a:p>
                   </a:txBody>
@@ -52620,7 +52665,7 @@
                           </a:solidFill>
                           <a:latin typeface="Calibri"/>
                         </a:rPr>
-                        <a:t>The GST is collected for the state.</a:t>
+                        <a:t>GST is collected for the state.</a:t>
                       </a:r>
                     </a:p>
                   </a:txBody>
@@ -52688,7 +52733,7 @@
                           </a:solidFill>
                           <a:latin typeface="Calibri"/>
                         </a:rPr>
-                        <a:t>The cost of the goods is paid to suppliers.</a:t>
+                        <a:t>The cost of the goods goes to suppliers.</a:t>
                       </a:r>
                     </a:p>
                   </a:txBody>
@@ -52699,7 +52744,7 @@
                   </a:tcPr>
                 </a:tc>
               </a:tr>
-              <a:tr h="369824">
+              <a:tr h="611632">
                 <a:tc>
                   <a:txBody>
                     <a:bodyPr/>
@@ -52756,7 +52801,7 @@
                           </a:solidFill>
                           <a:latin typeface="Calibri"/>
                         </a:rPr>
-                        <a:t>Delivery, returns, payment fees and marketing come with every order.</a:t>
+                        <a:t>Picking, delivery, fees, returns and retention offers come with every order.</a:t>
                       </a:r>
                     </a:p>
                   </a:txBody>
@@ -52767,7 +52812,7 @@
                   </a:tcPr>
                 </a:tc>
               </a:tr>
-              <a:tr h="369824">
+              <a:tr h="611632">
                 <a:tc>
                   <a:txBody>
                     <a:bodyPr/>
@@ -52780,7 +52825,7 @@
                           </a:solidFill>
                           <a:latin typeface="Calibri"/>
                         </a:rPr>
-                        <a:t>Contribution to operating profit</a:t>
+                        <a:t>Contribution to EBITDA</a:t>
                       </a:r>
                     </a:p>
                   </a:txBody>
@@ -52824,7 +52869,7 @@
                           </a:solidFill>
                           <a:latin typeface="Calibri"/>
                         </a:rPr>
-                        <a:t>Warehouses, technology and head office are fixed.</a:t>
+                        <a:t>Stores, warehouses, tech, head office and acquisition do not grow with one more order.</a:t>
                       </a:r>
                     </a:p>
                   </a:txBody>
@@ -56866,7 +56911,7 @@
       </p:sp>
       <p:pic>
         <p:nvPicPr>
-          <p:cNvPr id="9" name="mermaid diagram" descr="99238c27f1d2b5ed.png"/>
+          <p:cNvPr id="9" name="mermaid diagram" descr="b0704b47a3cbb9d0.png"/>
           <p:cNvPicPr>
             <a:picLocks noChangeAspect="1"/>
           </p:cNvPicPr>
@@ -56880,8 +56925,8 @@
         </p:blipFill>
         <p:spPr>
           <a:xfrm>
-            <a:off x="2129075" y="1682496"/>
-            <a:ext cx="7933544" cy="4517136"/>
+            <a:off x="3442926" y="1682496"/>
+            <a:ext cx="5305842" cy="4517136"/>
           </a:xfrm>
           <a:prstGeom prst="rect">
             <a:avLst/>
@@ -57561,7 +57606,7 @@
       </p:sp>
       <p:pic>
         <p:nvPicPr>
-          <p:cNvPr id="9" name="mermaid diagram" descr="ced87dd3731c1260.png"/>
+          <p:cNvPr id="9" name="mermaid diagram" descr="b3e65c98a2c7e6ea.png"/>
           <p:cNvPicPr>
             <a:picLocks noChangeAspect="1"/>
           </p:cNvPicPr>
@@ -57575,8 +57620,8 @@
         </p:blipFill>
         <p:spPr>
           <a:xfrm>
-            <a:off x="2821994" y="1664208"/>
-            <a:ext cx="6547706" cy="3203447"/>
+            <a:off x="2700740" y="1664208"/>
+            <a:ext cx="6790214" cy="3203447"/>
           </a:xfrm>
           <a:prstGeom prst="rect">
             <a:avLst/>
@@ -58447,7 +58492,7 @@
       </p:sp>
       <p:pic>
         <p:nvPicPr>
-          <p:cNvPr id="9" name="mermaid diagram" descr="525d467a66a568d3.png"/>
+          <p:cNvPr id="9" name="mermaid diagram" descr="1efa8da59bf12e23.png"/>
           <p:cNvPicPr>
             <a:picLocks noChangeAspect="1"/>
           </p:cNvPicPr>
@@ -58462,7 +58507,7 @@
         <p:spPr>
           <a:xfrm>
             <a:off x="780897" y="1956816"/>
-            <a:ext cx="10629900" cy="1357312"/>
+            <a:ext cx="10629900" cy="1857375"/>
           </a:xfrm>
           <a:prstGeom prst="rect">
             <a:avLst/>
@@ -58478,7 +58523,7 @@
           <p:nvPr/>
         </p:nvGraphicFramePr>
         <p:xfrm>
-          <a:off x="530352" y="3460432"/>
+          <a:off x="530352" y="3960495"/>
           <a:ext cx="11130991" cy="1849120"/>
         </p:xfrm>
         <a:graphic>

--- a/content/W01/D1/slides/C2_W01_D01_half1_STUDENT.pptx
+++ b/content/W01/D1/slides/C2_W01_D01_half1_STUDENT.pptx
@@ -2033,7 +2033,7 @@
           <a:lstStyle/>
           <a:p>
             <a:r>
-              <a:t>LIVE, 6 minutes. The sizing here is in fields, not seconds: the file's seven fields fill A and B.</a:t>
+              <a:t>LIVE, 6 minutes. The sizing here counts fields: the file's seven fields fill A and B.</a:t>
             </a:r>
           </a:p>
           <a:p>
@@ -2358,7 +2358,7 @@
           </a:p>
           <a:p>
             <a:r>
-              <a:t>page, and follow the Retail-Plus member's basket: Rs 2,000 of goods, a Rs 200 member discount,</a:t>
+              <a:t>page, and follow the Retail-Plus member's basket: Rs 2,000 of goods, Rs 200 off in a promotion,</a:t>
             </a:r>
           </a:p>
           <a:p>
@@ -3918,6 +3918,11 @@
           </a:p>
           <a:p>
             <a:r>
+              <a:t>Notebook 04 step 2 builds option C on Kalpa's own orders: a trimmed mean of Rs 2,300.</a:t>
+            </a:r>
+          </a:p>
+          <a:p>
+            <a:r>
               <a:t>Transition: the number marketing sent first.</a:t>
             </a:r>
           </a:p>
@@ -4209,11 +4214,6 @@
           <a:p>
             <a:r>
               <a:t>multi-brand e-commerce selling to Indian consumers runs that way under Press Note 2 of 2018.</a:t>
-            </a:r>
-          </a:p>
-          <a:p>
-            <a:r>
-              <a:t>Draw Rs 100's journey top to bottom, six boxes, each deduction on its arrow.</a:t>
             </a:r>
           </a:p>
           <a:p>
@@ -14066,7 +14066,7 @@
       </p:sp>
       <p:pic>
         <p:nvPicPr>
-          <p:cNvPr id="9" name="mermaid diagram" descr="86d98c2fe6e9f2bf.png"/>
+          <p:cNvPr id="9" name="mermaid diagram" descr="ce8493801b32e09f.png"/>
           <p:cNvPicPr>
             <a:picLocks noChangeAspect="1"/>
           </p:cNvPicPr>
@@ -14081,7 +14081,7 @@
         <p:spPr>
           <a:xfrm>
             <a:off x="530352" y="1956816"/>
-            <a:ext cx="11130991" cy="1007089"/>
+            <a:ext cx="11130991" cy="1187305"/>
           </a:xfrm>
           <a:prstGeom prst="rect">
             <a:avLst/>
@@ -14096,7 +14096,7 @@
         </p:nvSpPr>
         <p:spPr>
           <a:xfrm>
-            <a:off x="530352" y="3110209"/>
+            <a:off x="530352" y="3290425"/>
             <a:ext cx="11130991" cy="495807"/>
           </a:xfrm>
           <a:prstGeom prst="rect">
@@ -15927,7 +15927,7 @@
       </p:sp>
       <p:pic>
         <p:nvPicPr>
-          <p:cNvPr id="9" name="mermaid diagram" descr="498f781ce685a01f.png"/>
+          <p:cNvPr id="9" name="mermaid diagram" descr="ca8d2cc0c11d9c97.png"/>
           <p:cNvPicPr>
             <a:picLocks noChangeAspect="1"/>
           </p:cNvPicPr>
